--- a/Help.pptx
+++ b/Help.pptx
@@ -2,13 +2,13 @@
 <file path=ppt/presentation.xml><?xml version="1.0" encoding="utf-8"?>
 <p:presentation xmlns:a="http://schemas.openxmlformats.org/drawingml/2006/main" xmlns:r="http://schemas.openxmlformats.org/officeDocument/2006/relationships" xmlns:p="http://schemas.openxmlformats.org/presentationml/2006/main" saveSubsetFonts="1" autoCompressPictures="0">
   <p:sldMasterIdLst>
-    <p:sldMasterId id="2147483672" r:id="rId1"/>
+    <p:sldMasterId id="2147483684" r:id="rId1"/>
   </p:sldMasterIdLst>
   <p:sldIdLst>
     <p:sldId id="256" r:id="rId2"/>
     <p:sldId id="257" r:id="rId3"/>
   </p:sldIdLst>
-  <p:sldSz cx="7559675" cy="10691813"/>
+  <p:sldSz cx="7559675" cy="10080625"/>
   <p:notesSz cx="6858000" cy="9144000"/>
   <p:defaultTextStyle>
     <a:defPPr>
@@ -142,8 +142,8 @@
         </p:nvSpPr>
         <p:spPr>
           <a:xfrm>
-            <a:off x="566976" y="1749795"/>
-            <a:ext cx="6425724" cy="3722335"/>
+            <a:off x="566976" y="1649770"/>
+            <a:ext cx="6425724" cy="3509551"/>
           </a:xfrm>
         </p:spPr>
         <p:txBody>
@@ -174,8 +174,8 @@
         </p:nvSpPr>
         <p:spPr>
           <a:xfrm>
-            <a:off x="944960" y="5615678"/>
-            <a:ext cx="5669756" cy="2581379"/>
+            <a:off x="944960" y="5294662"/>
+            <a:ext cx="5669756" cy="2433817"/>
           </a:xfrm>
         </p:spPr>
         <p:txBody>
@@ -295,7 +295,7 @@
     </p:spTree>
     <p:extLst>
       <p:ext uri="{BB962C8B-B14F-4D97-AF65-F5344CB8AC3E}">
-        <p14:creationId xmlns:p14="http://schemas.microsoft.com/office/powerpoint/2010/main" val="1159928982"/>
+        <p14:creationId xmlns:p14="http://schemas.microsoft.com/office/powerpoint/2010/main" val="1975751910"/>
       </p:ext>
     </p:extLst>
   </p:cSld>
@@ -497,7 +497,7 @@
     </p:spTree>
     <p:extLst>
       <p:ext uri="{BB962C8B-B14F-4D97-AF65-F5344CB8AC3E}">
-        <p14:creationId xmlns:p14="http://schemas.microsoft.com/office/powerpoint/2010/main" val="205697691"/>
+        <p14:creationId xmlns:p14="http://schemas.microsoft.com/office/powerpoint/2010/main" val="3431964990"/>
       </p:ext>
     </p:extLst>
   </p:cSld>
@@ -536,8 +536,8 @@
         </p:nvSpPr>
         <p:spPr>
           <a:xfrm>
-            <a:off x="5409893" y="569240"/>
-            <a:ext cx="1630055" cy="9060817"/>
+            <a:off x="5409893" y="536700"/>
+            <a:ext cx="1630055" cy="8542864"/>
           </a:xfrm>
         </p:spPr>
         <p:txBody>
@@ -564,8 +564,8 @@
         </p:nvSpPr>
         <p:spPr>
           <a:xfrm>
-            <a:off x="519728" y="569240"/>
-            <a:ext cx="4795669" cy="9060817"/>
+            <a:off x="519728" y="536700"/>
+            <a:ext cx="4795669" cy="8542864"/>
           </a:xfrm>
         </p:spPr>
         <p:txBody>
@@ -709,7 +709,7 @@
     </p:spTree>
     <p:extLst>
       <p:ext uri="{BB962C8B-B14F-4D97-AF65-F5344CB8AC3E}">
-        <p14:creationId xmlns:p14="http://schemas.microsoft.com/office/powerpoint/2010/main" val="3600013082"/>
+        <p14:creationId xmlns:p14="http://schemas.microsoft.com/office/powerpoint/2010/main" val="2157211165"/>
       </p:ext>
     </p:extLst>
   </p:cSld>
@@ -911,7 +911,7 @@
     </p:spTree>
     <p:extLst>
       <p:ext uri="{BB962C8B-B14F-4D97-AF65-F5344CB8AC3E}">
-        <p14:creationId xmlns:p14="http://schemas.microsoft.com/office/powerpoint/2010/main" val="3586397274"/>
+        <p14:creationId xmlns:p14="http://schemas.microsoft.com/office/powerpoint/2010/main" val="2563033330"/>
       </p:ext>
     </p:extLst>
   </p:cSld>
@@ -950,8 +950,8 @@
         </p:nvSpPr>
         <p:spPr>
           <a:xfrm>
-            <a:off x="515791" y="2665532"/>
-            <a:ext cx="6520220" cy="4447496"/>
+            <a:off x="515791" y="2513159"/>
+            <a:ext cx="6520220" cy="4193259"/>
           </a:xfrm>
         </p:spPr>
         <p:txBody>
@@ -982,8 +982,8 @@
         </p:nvSpPr>
         <p:spPr>
           <a:xfrm>
-            <a:off x="515791" y="7155103"/>
-            <a:ext cx="6520220" cy="2338833"/>
+            <a:off x="515791" y="6746088"/>
+            <a:ext cx="6520220" cy="2205136"/>
           </a:xfrm>
         </p:spPr>
         <p:txBody>
@@ -1157,7 +1157,7 @@
     </p:spTree>
     <p:extLst>
       <p:ext uri="{BB962C8B-B14F-4D97-AF65-F5344CB8AC3E}">
-        <p14:creationId xmlns:p14="http://schemas.microsoft.com/office/powerpoint/2010/main" val="1338191100"/>
+        <p14:creationId xmlns:p14="http://schemas.microsoft.com/office/powerpoint/2010/main" val="949962271"/>
       </p:ext>
     </p:extLst>
   </p:cSld>
@@ -1219,8 +1219,8 @@
         </p:nvSpPr>
         <p:spPr>
           <a:xfrm>
-            <a:off x="519728" y="2846200"/>
-            <a:ext cx="3212862" cy="6783857"/>
+            <a:off x="519728" y="2683500"/>
+            <a:ext cx="3212862" cy="6396064"/>
           </a:xfrm>
         </p:spPr>
         <p:txBody>
@@ -1308,8 +1308,8 @@
         </p:nvSpPr>
         <p:spPr>
           <a:xfrm>
-            <a:off x="3827085" y="2846200"/>
-            <a:ext cx="3212862" cy="6783857"/>
+            <a:off x="3827085" y="2683500"/>
+            <a:ext cx="3212862" cy="6396064"/>
           </a:xfrm>
         </p:spPr>
         <p:txBody>
@@ -1453,7 +1453,7 @@
     </p:spTree>
     <p:extLst>
       <p:ext uri="{BB962C8B-B14F-4D97-AF65-F5344CB8AC3E}">
-        <p14:creationId xmlns:p14="http://schemas.microsoft.com/office/powerpoint/2010/main" val="1560835388"/>
+        <p14:creationId xmlns:p14="http://schemas.microsoft.com/office/powerpoint/2010/main" val="807585052"/>
       </p:ext>
     </p:extLst>
   </p:cSld>
@@ -1492,8 +1492,8 @@
         </p:nvSpPr>
         <p:spPr>
           <a:xfrm>
-            <a:off x="520712" y="569242"/>
-            <a:ext cx="6520220" cy="2066590"/>
+            <a:off x="520712" y="536702"/>
+            <a:ext cx="6520220" cy="1948455"/>
           </a:xfrm>
         </p:spPr>
         <p:txBody>
@@ -1520,8 +1520,8 @@
         </p:nvSpPr>
         <p:spPr>
           <a:xfrm>
-            <a:off x="520713" y="2620980"/>
-            <a:ext cx="3198096" cy="1284502"/>
+            <a:off x="520713" y="2471154"/>
+            <a:ext cx="3198096" cy="1211074"/>
           </a:xfrm>
         </p:spPr>
         <p:txBody>
@@ -1585,8 +1585,8 @@
         </p:nvSpPr>
         <p:spPr>
           <a:xfrm>
-            <a:off x="520713" y="3905482"/>
-            <a:ext cx="3198096" cy="5744375"/>
+            <a:off x="520713" y="3682228"/>
+            <a:ext cx="3198096" cy="5416003"/>
           </a:xfrm>
         </p:spPr>
         <p:txBody>
@@ -1674,8 +1674,8 @@
         </p:nvSpPr>
         <p:spPr>
           <a:xfrm>
-            <a:off x="3827086" y="2620980"/>
-            <a:ext cx="3213847" cy="1284502"/>
+            <a:off x="3827086" y="2471154"/>
+            <a:ext cx="3213847" cy="1211074"/>
           </a:xfrm>
         </p:spPr>
         <p:txBody>
@@ -1739,8 +1739,8 @@
         </p:nvSpPr>
         <p:spPr>
           <a:xfrm>
-            <a:off x="3827086" y="3905482"/>
-            <a:ext cx="3213847" cy="5744375"/>
+            <a:off x="3827086" y="3682228"/>
+            <a:ext cx="3213847" cy="5416003"/>
           </a:xfrm>
         </p:spPr>
         <p:txBody>
@@ -1884,7 +1884,7 @@
     </p:spTree>
     <p:extLst>
       <p:ext uri="{BB962C8B-B14F-4D97-AF65-F5344CB8AC3E}">
-        <p14:creationId xmlns:p14="http://schemas.microsoft.com/office/powerpoint/2010/main" val="294154452"/>
+        <p14:creationId xmlns:p14="http://schemas.microsoft.com/office/powerpoint/2010/main" val="4249878992"/>
       </p:ext>
     </p:extLst>
   </p:cSld>
@@ -2002,7 +2002,7 @@
     </p:spTree>
     <p:extLst>
       <p:ext uri="{BB962C8B-B14F-4D97-AF65-F5344CB8AC3E}">
-        <p14:creationId xmlns:p14="http://schemas.microsoft.com/office/powerpoint/2010/main" val="2071573993"/>
+        <p14:creationId xmlns:p14="http://schemas.microsoft.com/office/powerpoint/2010/main" val="2450002071"/>
       </p:ext>
     </p:extLst>
   </p:cSld>
@@ -2097,7 +2097,7 @@
     </p:spTree>
     <p:extLst>
       <p:ext uri="{BB962C8B-B14F-4D97-AF65-F5344CB8AC3E}">
-        <p14:creationId xmlns:p14="http://schemas.microsoft.com/office/powerpoint/2010/main" val="2284665591"/>
+        <p14:creationId xmlns:p14="http://schemas.microsoft.com/office/powerpoint/2010/main" val="2525989895"/>
       </p:ext>
     </p:extLst>
   </p:cSld>
@@ -2136,8 +2136,8 @@
         </p:nvSpPr>
         <p:spPr>
           <a:xfrm>
-            <a:off x="520712" y="712788"/>
-            <a:ext cx="2438192" cy="2494756"/>
+            <a:off x="520712" y="672042"/>
+            <a:ext cx="2438192" cy="2352146"/>
           </a:xfrm>
         </p:spPr>
         <p:txBody>
@@ -2168,8 +2168,8 @@
         </p:nvSpPr>
         <p:spPr>
           <a:xfrm>
-            <a:off x="3213847" y="1539425"/>
-            <a:ext cx="3827085" cy="7598117"/>
+            <a:off x="3213847" y="1451426"/>
+            <a:ext cx="3827085" cy="7163777"/>
           </a:xfrm>
         </p:spPr>
         <p:txBody>
@@ -2285,8 +2285,8 @@
         </p:nvSpPr>
         <p:spPr>
           <a:xfrm>
-            <a:off x="520712" y="3207544"/>
-            <a:ext cx="2438192" cy="5942372"/>
+            <a:off x="520712" y="3024188"/>
+            <a:ext cx="2438192" cy="5602681"/>
           </a:xfrm>
         </p:spPr>
         <p:txBody>
@@ -2406,7 +2406,7 @@
     </p:spTree>
     <p:extLst>
       <p:ext uri="{BB962C8B-B14F-4D97-AF65-F5344CB8AC3E}">
-        <p14:creationId xmlns:p14="http://schemas.microsoft.com/office/powerpoint/2010/main" val="3574901079"/>
+        <p14:creationId xmlns:p14="http://schemas.microsoft.com/office/powerpoint/2010/main" val="1594792081"/>
       </p:ext>
     </p:extLst>
   </p:cSld>
@@ -2445,8 +2445,8 @@
         </p:nvSpPr>
         <p:spPr>
           <a:xfrm>
-            <a:off x="520712" y="712788"/>
-            <a:ext cx="2438192" cy="2494756"/>
+            <a:off x="520712" y="672042"/>
+            <a:ext cx="2438192" cy="2352146"/>
           </a:xfrm>
         </p:spPr>
         <p:txBody>
@@ -2477,8 +2477,8 @@
         </p:nvSpPr>
         <p:spPr>
           <a:xfrm>
-            <a:off x="3213847" y="1539425"/>
-            <a:ext cx="3827085" cy="7598117"/>
+            <a:off x="3213847" y="1451426"/>
+            <a:ext cx="3827085" cy="7163777"/>
           </a:xfrm>
         </p:spPr>
         <p:txBody>
@@ -2542,8 +2542,8 @@
         </p:nvSpPr>
         <p:spPr>
           <a:xfrm>
-            <a:off x="520712" y="3207544"/>
-            <a:ext cx="2438192" cy="5942372"/>
+            <a:off x="520712" y="3024188"/>
+            <a:ext cx="2438192" cy="5602681"/>
           </a:xfrm>
         </p:spPr>
         <p:txBody>
@@ -2663,7 +2663,7 @@
     </p:spTree>
     <p:extLst>
       <p:ext uri="{BB962C8B-B14F-4D97-AF65-F5344CB8AC3E}">
-        <p14:creationId xmlns:p14="http://schemas.microsoft.com/office/powerpoint/2010/main" val="4078980189"/>
+        <p14:creationId xmlns:p14="http://schemas.microsoft.com/office/powerpoint/2010/main" val="2573854112"/>
       </p:ext>
     </p:extLst>
   </p:cSld>
@@ -2707,8 +2707,8 @@
         </p:nvSpPr>
         <p:spPr>
           <a:xfrm>
-            <a:off x="519728" y="569242"/>
-            <a:ext cx="6520220" cy="2066590"/>
+            <a:off x="519728" y="536702"/>
+            <a:ext cx="6520220" cy="1948455"/>
           </a:xfrm>
           <a:prstGeom prst="rect">
             <a:avLst/>
@@ -2740,8 +2740,8 @@
         </p:nvSpPr>
         <p:spPr>
           <a:xfrm>
-            <a:off x="519728" y="2846200"/>
-            <a:ext cx="6520220" cy="6783857"/>
+            <a:off x="519728" y="2683500"/>
+            <a:ext cx="6520220" cy="6396064"/>
           </a:xfrm>
           <a:prstGeom prst="rect">
             <a:avLst/>
@@ -2834,8 +2834,8 @@
         </p:nvSpPr>
         <p:spPr>
           <a:xfrm>
-            <a:off x="519728" y="9909729"/>
-            <a:ext cx="1700927" cy="569240"/>
+            <a:off x="519728" y="9343248"/>
+            <a:ext cx="1700927" cy="536700"/>
           </a:xfrm>
           <a:prstGeom prst="rect">
             <a:avLst/>
@@ -2875,8 +2875,8 @@
         </p:nvSpPr>
         <p:spPr>
           <a:xfrm>
-            <a:off x="2504143" y="9909729"/>
-            <a:ext cx="2551390" cy="569240"/>
+            <a:off x="2504143" y="9343248"/>
+            <a:ext cx="2551390" cy="536700"/>
           </a:xfrm>
           <a:prstGeom prst="rect">
             <a:avLst/>
@@ -2912,8 +2912,8 @@
         </p:nvSpPr>
         <p:spPr>
           <a:xfrm>
-            <a:off x="5339020" y="9909729"/>
-            <a:ext cx="1700927" cy="569240"/>
+            <a:off x="5339020" y="9343248"/>
+            <a:ext cx="1700927" cy="536700"/>
           </a:xfrm>
           <a:prstGeom prst="rect">
             <a:avLst/>
@@ -2944,23 +2944,23 @@
     </p:spTree>
     <p:extLst>
       <p:ext uri="{BB962C8B-B14F-4D97-AF65-F5344CB8AC3E}">
-        <p14:creationId xmlns:p14="http://schemas.microsoft.com/office/powerpoint/2010/main" val="863339392"/>
+        <p14:creationId xmlns:p14="http://schemas.microsoft.com/office/powerpoint/2010/main" val="3965882515"/>
       </p:ext>
     </p:extLst>
   </p:cSld>
   <p:clrMap bg1="lt1" tx1="dk1" bg2="lt2" tx2="dk2" accent1="accent1" accent2="accent2" accent3="accent3" accent4="accent4" accent5="accent5" accent6="accent6" hlink="hlink" folHlink="folHlink"/>
   <p:sldLayoutIdLst>
-    <p:sldLayoutId id="2147483673" r:id="rId1"/>
-    <p:sldLayoutId id="2147483674" r:id="rId2"/>
-    <p:sldLayoutId id="2147483675" r:id="rId3"/>
-    <p:sldLayoutId id="2147483676" r:id="rId4"/>
-    <p:sldLayoutId id="2147483677" r:id="rId5"/>
-    <p:sldLayoutId id="2147483678" r:id="rId6"/>
-    <p:sldLayoutId id="2147483679" r:id="rId7"/>
-    <p:sldLayoutId id="2147483680" r:id="rId8"/>
-    <p:sldLayoutId id="2147483681" r:id="rId9"/>
-    <p:sldLayoutId id="2147483682" r:id="rId10"/>
-    <p:sldLayoutId id="2147483683" r:id="rId11"/>
+    <p:sldLayoutId id="2147483685" r:id="rId1"/>
+    <p:sldLayoutId id="2147483686" r:id="rId2"/>
+    <p:sldLayoutId id="2147483687" r:id="rId3"/>
+    <p:sldLayoutId id="2147483688" r:id="rId4"/>
+    <p:sldLayoutId id="2147483689" r:id="rId5"/>
+    <p:sldLayoutId id="2147483690" r:id="rId6"/>
+    <p:sldLayoutId id="2147483691" r:id="rId7"/>
+    <p:sldLayoutId id="2147483692" r:id="rId8"/>
+    <p:sldLayoutId id="2147483693" r:id="rId9"/>
+    <p:sldLayoutId id="2147483694" r:id="rId10"/>
+    <p:sldLayoutId id="2147483695" r:id="rId11"/>
   </p:sldLayoutIdLst>
   <p:txStyles>
     <p:titleStyle>
@@ -3276,8 +3276,8 @@
         </p:nvSpPr>
         <p:spPr>
           <a:xfrm>
-            <a:off x="0" y="0"/>
-            <a:ext cx="2267413" cy="10691812"/>
+            <a:off x="1" y="0"/>
+            <a:ext cx="2267413" cy="10080624"/>
           </a:xfrm>
           <a:prstGeom prst="roundRect">
             <a:avLst/>
@@ -3373,8 +3373,8 @@
         </p:nvSpPr>
         <p:spPr>
           <a:xfrm>
-            <a:off x="5292262" y="1"/>
-            <a:ext cx="2267413" cy="10691812"/>
+            <a:off x="5292263" y="-1"/>
+            <a:ext cx="2267413" cy="10080625"/>
           </a:xfrm>
           <a:prstGeom prst="roundRect">
             <a:avLst/>
@@ -3470,8 +3470,8 @@
         </p:nvSpPr>
         <p:spPr>
           <a:xfrm>
-            <a:off x="2267413" y="1"/>
-            <a:ext cx="3024849" cy="10691812"/>
+            <a:off x="2237250" y="0"/>
+            <a:ext cx="3024849" cy="10080625"/>
           </a:xfrm>
           <a:prstGeom prst="roundRect">
             <a:avLst/>
@@ -3612,7 +3612,7 @@
         </p:blipFill>
         <p:spPr>
           <a:xfrm>
-            <a:off x="543350" y="1037353"/>
+            <a:off x="611083" y="1188959"/>
             <a:ext cx="443715" cy="479213"/>
           </a:xfrm>
           <a:prstGeom prst="rect">
@@ -3634,7 +3634,7 @@
         </p:nvSpPr>
         <p:spPr>
           <a:xfrm>
-            <a:off x="1438507" y="1037353"/>
+            <a:off x="1506240" y="1188958"/>
             <a:ext cx="5051503" cy="1477328"/>
           </a:xfrm>
           <a:prstGeom prst="rect">
@@ -3706,7 +3706,7 @@
         </p:blipFill>
         <p:spPr>
           <a:xfrm>
-            <a:off x="508443" y="3197283"/>
+            <a:off x="576176" y="3348888"/>
             <a:ext cx="513527" cy="415712"/>
           </a:xfrm>
           <a:prstGeom prst="rect">
@@ -3728,7 +3728,7 @@
         </p:nvSpPr>
         <p:spPr>
           <a:xfrm>
-            <a:off x="1438507" y="3085771"/>
+            <a:off x="1506240" y="3237376"/>
             <a:ext cx="5051503" cy="1754326"/>
           </a:xfrm>
           <a:prstGeom prst="rect">
